--- a/project-documentation/slides/week-06-deck.pptx
+++ b/project-documentation/slides/week-06-deck.pptx
@@ -2145,7 +2145,7 @@
           <a:lstStyle/>
           <a:p>
             <a:r>
-              <a:t>AEL slot: the evaluation of the LLM wiki. The AEL lecturer fills this card in, or uses it to take the floor.</a:t>
+              <a:t>AEL slot: a peer review of the LLM wikis, then one improvement built. Pair the teams. Each pair opens both wikis and compares them: what they hold, how they are organised, how well they answer a question. Each team then chooses its next improvement. It can come from what they saw in the other wiki, from the conversation, or from an idea they already had and tested on the other team. Then half an hour to build it. Teams that kept a different knowledge architecture compare that instead. Remind them that the change is a decision and goes in the decision log.</a:t>
             </a:r>
           </a:p>
         </p:txBody>
@@ -11918,7 +11918,7 @@
                   <a:srgbClr val="111827"/>
                 </a:solidFill>
               </a:rPr>
-              <a:t>Evaluation of the LLM wiki</a:t>
+              <a:t>Compare wikis with a peer team, then build your next improvement</a:t>
             </a:r>
           </a:p>
         </p:txBody>
@@ -11932,7 +11932,7 @@
         <p:spPr>
           <a:xfrm>
             <a:off x="731520" y="2103120"/>
-            <a:ext cx="10698480" cy="3931920"/>
+            <a:ext cx="3261360" cy="3931920"/>
           </a:xfrm>
           <a:prstGeom prst="rect">
             <a:avLst/>
@@ -11951,12 +11951,27 @@
               </a:spcAft>
             </a:pPr>
             <a:r>
-              <a:rPr sz="1800" i="1">
-                <a:solidFill>
-                  <a:srgbClr val="6B7280"/>
-                </a:solidFill>
-              </a:rPr>
-              <a:t>Filled in the session.</a:t>
+              <a:rPr sz="1100" b="1">
+                <a:solidFill>
+                  <a:srgbClr val="4B5563"/>
+                </a:solidFill>
+              </a:rPr>
+              <a:t>COMPARE</a:t>
+            </a:r>
+          </a:p>
+          <a:p>
+            <a:pPr>
+              <a:spcAft>
+                <a:spcPts val="800"/>
+              </a:spcAft>
+            </a:pPr>
+            <a:r>
+              <a:rPr sz="1800">
+                <a:solidFill>
+                  <a:srgbClr val="111827"/>
+                </a:solidFill>
+              </a:rPr>
+              <a:t>Open each other's wiki</a:t>
             </a:r>
           </a:p>
         </p:txBody>
@@ -11964,6 +11979,112 @@
       <p:sp>
         <p:nvSpPr>
           <p:cNvPr id="7" name="TextBox 6"/>
+          <p:cNvSpPr txBox="1"/>
+          <p:nvPr/>
+        </p:nvSpPr>
+        <p:spPr>
+          <a:xfrm>
+            <a:off x="4450080" y="2103120"/>
+            <a:ext cx="3261360" cy="3931920"/>
+          </a:xfrm>
+          <a:prstGeom prst="rect">
+            <a:avLst/>
+          </a:prstGeom>
+          <a:noFill/>
+        </p:spPr>
+        <p:txBody>
+          <a:bodyPr wrap="square">
+            <a:spAutoFit/>
+          </a:bodyPr>
+          <a:lstStyle/>
+          <a:p>
+            <a:pPr>
+              <a:spcAft>
+                <a:spcPts val="800"/>
+              </a:spcAft>
+            </a:pPr>
+            <a:r>
+              <a:rPr sz="1100" b="1">
+                <a:solidFill>
+                  <a:srgbClr val="4B5563"/>
+                </a:solidFill>
+              </a:rPr>
+              <a:t>CHOOSE</a:t>
+            </a:r>
+          </a:p>
+          <a:p>
+            <a:pPr>
+              <a:spcAft>
+                <a:spcPts val="800"/>
+              </a:spcAft>
+            </a:pPr>
+            <a:r>
+              <a:rPr sz="1800">
+                <a:solidFill>
+                  <a:srgbClr val="111827"/>
+                </a:solidFill>
+              </a:rPr>
+              <a:t>One next improvement: seen, discussed, or your own idea tested on them</a:t>
+            </a:r>
+          </a:p>
+        </p:txBody>
+      </p:sp>
+      <p:sp>
+        <p:nvSpPr>
+          <p:cNvPr id="8" name="TextBox 7"/>
+          <p:cNvSpPr txBox="1"/>
+          <p:nvPr/>
+        </p:nvSpPr>
+        <p:spPr>
+          <a:xfrm>
+            <a:off x="8168640" y="2103120"/>
+            <a:ext cx="3261360" cy="3931920"/>
+          </a:xfrm>
+          <a:prstGeom prst="rect">
+            <a:avLst/>
+          </a:prstGeom>
+          <a:noFill/>
+        </p:spPr>
+        <p:txBody>
+          <a:bodyPr wrap="square">
+            <a:spAutoFit/>
+          </a:bodyPr>
+          <a:lstStyle/>
+          <a:p>
+            <a:pPr>
+              <a:spcAft>
+                <a:spcPts val="800"/>
+              </a:spcAft>
+            </a:pPr>
+            <a:r>
+              <a:rPr sz="1100" b="1">
+                <a:solidFill>
+                  <a:srgbClr val="4B5563"/>
+                </a:solidFill>
+              </a:rPr>
+              <a:t>BUILD</a:t>
+            </a:r>
+          </a:p>
+          <a:p>
+            <a:pPr>
+              <a:spcAft>
+                <a:spcPts val="800"/>
+              </a:spcAft>
+            </a:pPr>
+            <a:r>
+              <a:rPr sz="1800" b="1">
+                <a:solidFill>
+                  <a:srgbClr val="111827"/>
+                </a:solidFill>
+              </a:rPr>
+              <a:t>30 minutes</a:t>
+            </a:r>
+          </a:p>
+        </p:txBody>
+      </p:sp>
+      <p:sp>
+        <p:nvSpPr>
+          <p:cNvPr id="9" name="TextBox 8"/>
           <p:cNvSpPr txBox="1"/>
           <p:nvPr/>
         </p:nvSpPr>

--- a/project-documentation/slides/week-06-deck.pptx
+++ b/project-documentation/slides/week-06-deck.pptx
@@ -1865,7 +1865,7 @@
           <a:lstStyle/>
           <a:p>
             <a:r>
-              <a:t>The rulebook. Rules 1 to 3 from weeks 1 to 3; rule 4 from week 4, "Technology is not the barrier"; rule 5 from week 5, know your known and unknown knowns and unknowns. Rule 6 is added together in this session.</a:t>
+              <a:t>The rulebook. Rules 1 to 3 from weeks 1 to 3; rule 4 from week 4, "Technology is not the barrier"; rule 5 from week 5, know your known and unknown knowns and unknowns. Rule 6, "It is never done", was written together in this session.</a:t>
             </a:r>
           </a:p>
         </p:txBody>
@@ -10884,12 +10884,28 @@
               </a:spcAft>
             </a:pPr>
             <a:r>
-              <a:rPr sz="1800" i="1">
-                <a:solidFill>
-                  <a:srgbClr val="6B7280"/>
-                </a:solidFill>
-              </a:rPr>
-              <a:t>Added together in the session.</a:t>
+              <a:rPr sz="1800">
+                <a:solidFill>
+                  <a:srgbClr val="111827"/>
+                </a:solidFill>
+              </a:rPr>
+              <a:t>It is </a:t>
+            </a:r>
+            <a:r>
+              <a:rPr sz="1800" b="1">
+                <a:solidFill>
+                  <a:srgbClr val="111827"/>
+                </a:solidFill>
+              </a:rPr>
+              <a:t>never</a:t>
+            </a:r>
+            <a:r>
+              <a:rPr sz="1800">
+                <a:solidFill>
+                  <a:srgbClr val="111827"/>
+                </a:solidFill>
+              </a:rPr>
+              <a:t> done.</a:t>
             </a:r>
           </a:p>
         </p:txBody>

--- a/project-documentation/slides/week-06-deck.pptx
+++ b/project-documentation/slides/week-06-deck.pptx
@@ -1865,7 +1865,7 @@
           <a:lstStyle/>
           <a:p>
             <a:r>
-              <a:t>The rulebook. Rules 1 to 3 from weeks 1 to 3; rule 4 from week 4, "Technology is not the barrier"; rule 5 from week 5, know your known and unknown knowns and unknowns. Rule 6, "It is never done", was written together in this session.</a:t>
+              <a:t>The rulebook. Rules 1 to 3 from weeks 1 to 3; rule 4 from week 4, "Technology is not the barrier"; rule 5 from week 5, "Never make someone else's problem yours", written on the board above the four kinds of knowns and unknowns. Rule 6, "It is never done", was written together in this session.</a:t>
             </a:r>
           </a:p>
         </p:txBody>
@@ -10820,7 +10820,7 @@
                   <a:srgbClr val="111827"/>
                 </a:solidFill>
               </a:rPr>
-              <a:t>Know your </a:t>
+              <a:t>Never make </a:t>
             </a:r>
             <a:r>
               <a:rPr sz="1800" b="1">
@@ -10828,7 +10828,7 @@
                   <a:srgbClr val="111827"/>
                 </a:solidFill>
               </a:rPr>
-              <a:t>(un)known (un)knowns</a:t>
+              <a:t>someone else’s</a:t>
             </a:r>
             <a:r>
               <a:rPr sz="1800">
@@ -10836,7 +10836,7 @@
                   <a:srgbClr val="111827"/>
                 </a:solidFill>
               </a:rPr>
-              <a:t>.</a:t>
+              <a:t> problem yours.</a:t>
             </a:r>
           </a:p>
         </p:txBody>
